--- a/docs/presentation.pptx
+++ b/docs/presentation.pptx
@@ -3148,7 +3148,7 @@
             </a:r>
             <a:br/>
             <a:r>
-              <a:t>Candidate: Shivam Pal | College: Campus Finalist</a:t>
+              <a:t>Candidate: Shivam Pal | IIIT Agartala (shivam_24uics157@iiitagartala.ac.in)</a:t>
             </a:r>
           </a:p>
         </p:txBody>
